--- a/madd-decks/dagger-alif/09-ain-ghain.pptx
+++ b/madd-decks/dagger-alif/09-ain-ghain.pptx
@@ -4,6 +4,9 @@
   <p:sldMasterIdLst>
     <p:sldMasterId id="2147483648" r:id="rId1"/>
   </p:sldMasterIdLst>
+  <p:notesMasterIdLst>
+    <p:notesMasterId r:id="rId24"/>
+  </p:notesMasterIdLst>
   <p:sldIdLst>
     <p:sldId id="256" r:id="rId2"/>
     <p:sldId id="257" r:id="rId3"/>
@@ -28,9 +31,6 @@
     <p:sldId id="276" r:id="rId22"/>
     <p:sldId id="277" r:id="rId23"/>
   </p:sldIdLst>
-  <p:notesMasterIdLst>
-    <p:notesMasterId r:id="rId24"/>
-  </p:notesMasterIdLst>
   <p:sldSz cx="9144000" cy="5143500"/>
   <p:notesSz cx="5143500" cy="9144000"/>
   <p:defaultTextStyle>
@@ -4577,9 +4577,6 @@
               </a:rPr>
               <a:t>غَ</a:t>
             </a:r>
-            <a:pPr algn="ctr" indent="0" marL="0">
-              <a:buNone/>
-            </a:pPr>
             <a:r>
               <a:rPr lang="ar-SA" altLang="en-US" sz="5850" dirty="0">
                 <a:solidFill>
@@ -4591,9 +4588,6 @@
               </a:rPr>
               <a:t>ا</a:t>
             </a:r>
-            <a:pPr algn="ctr" indent="0" marL="0">
-              <a:buNone/>
-            </a:pPr>
             <a:r>
               <a:rPr lang="ar-SA" altLang="en-US" sz="9000" dirty="0">
                 <a:solidFill>
@@ -6144,9 +6138,6 @@
               </a:rPr>
               <a:t>رَجَعَ</a:t>
             </a:r>
-            <a:pPr algn="ctr" indent="0" marL="0">
-              <a:buNone/>
-            </a:pPr>
             <a:r>
               <a:rPr lang="ar-SA" altLang="en-US" sz="4290" dirty="0">
                 <a:solidFill>
@@ -7859,9 +7850,6 @@
               </a:rPr>
               <a:t>قَطَعَ</a:t>
             </a:r>
-            <a:pPr algn="ctr" indent="0" marL="0">
-              <a:buNone/>
-            </a:pPr>
             <a:r>
               <a:rPr lang="ar-SA" altLang="en-US" sz="4290" dirty="0">
                 <a:solidFill>
@@ -9574,9 +9562,6 @@
               </a:rPr>
               <a:t>سَمَعَ</a:t>
             </a:r>
-            <a:pPr algn="ctr" indent="0" marL="0">
-              <a:buNone/>
-            </a:pPr>
             <a:r>
               <a:rPr lang="ar-SA" altLang="en-US" sz="4290" dirty="0">
                 <a:solidFill>
@@ -11289,9 +11274,6 @@
               </a:rPr>
               <a:t>عَ</a:t>
             </a:r>
-            <a:pPr algn="ctr" indent="0" marL="0">
-              <a:buNone/>
-            </a:pPr>
             <a:r>
               <a:rPr lang="ar-SA" altLang="en-US" sz="4290" dirty="0">
                 <a:solidFill>
@@ -11303,9 +11285,6 @@
               </a:rPr>
               <a:t>ا</a:t>
             </a:r>
-            <a:pPr algn="ctr" indent="0" marL="0">
-              <a:buNone/>
-            </a:pPr>
             <a:r>
               <a:rPr lang="ar-SA" altLang="en-US" sz="6600" dirty="0">
                 <a:solidFill>
@@ -13018,9 +12997,6 @@
               </a:rPr>
               <a:t>عَ</a:t>
             </a:r>
-            <a:pPr algn="ctr" indent="0" marL="0">
-              <a:buNone/>
-            </a:pPr>
             <a:r>
               <a:rPr lang="ar-SA" altLang="en-US" sz="4290" dirty="0">
                 <a:solidFill>
@@ -13032,9 +13008,6 @@
               </a:rPr>
               <a:t>ا</a:t>
             </a:r>
-            <a:pPr algn="ctr" indent="0" marL="0">
-              <a:buNone/>
-            </a:pPr>
             <a:r>
               <a:rPr lang="ar-SA" altLang="en-US" sz="6600" dirty="0">
                 <a:solidFill>
@@ -14747,9 +14720,6 @@
               </a:rPr>
               <a:t>عَ</a:t>
             </a:r>
-            <a:pPr algn="ctr" indent="0" marL="0">
-              <a:buNone/>
-            </a:pPr>
             <a:r>
               <a:rPr lang="ar-SA" altLang="en-US" sz="4290" dirty="0">
                 <a:solidFill>
@@ -14761,9 +14731,6 @@
               </a:rPr>
               <a:t>ا</a:t>
             </a:r>
-            <a:pPr algn="ctr" indent="0" marL="0">
-              <a:buNone/>
-            </a:pPr>
             <a:r>
               <a:rPr lang="ar-SA" altLang="en-US" sz="6600" dirty="0">
                 <a:solidFill>
@@ -16476,9 +16443,6 @@
               </a:rPr>
               <a:t>بَلَغَ</a:t>
             </a:r>
-            <a:pPr algn="ctr" indent="0" marL="0">
-              <a:buNone/>
-            </a:pPr>
             <a:r>
               <a:rPr lang="ar-SA" altLang="en-US" sz="4290" dirty="0">
                 <a:solidFill>
@@ -18191,9 +18155,6 @@
               </a:rPr>
               <a:t>فَرَغَ</a:t>
             </a:r>
-            <a:pPr algn="ctr" indent="0" marL="0">
-              <a:buNone/>
-            </a:pPr>
             <a:r>
               <a:rPr lang="ar-SA" altLang="en-US" sz="4290" dirty="0">
                 <a:solidFill>
@@ -19906,9 +19867,6 @@
               </a:rPr>
               <a:t>صَبَغَ</a:t>
             </a:r>
-            <a:pPr algn="ctr" indent="0" marL="0">
-              <a:buNone/>
-            </a:pPr>
             <a:r>
               <a:rPr lang="ar-SA" altLang="en-US" sz="4290" dirty="0">
                 <a:solidFill>
@@ -21493,9 +21451,6 @@
               </a:rPr>
               <a:t>دَعَ</a:t>
             </a:r>
-            <a:pPr algn="ctr" indent="0" marL="0">
-              <a:buNone/>
-            </a:pPr>
             <a:r>
               <a:rPr lang="ar-SA" altLang="en-US" sz="5850" dirty="0">
                 <a:solidFill>
@@ -23046,9 +23001,6 @@
               </a:rPr>
               <a:t>غَ</a:t>
             </a:r>
-            <a:pPr algn="ctr" indent="0" marL="0">
-              <a:buNone/>
-            </a:pPr>
             <a:r>
               <a:rPr lang="ar-SA" altLang="en-US" sz="4290" dirty="0">
                 <a:solidFill>
@@ -23060,9 +23012,6 @@
               </a:rPr>
               <a:t>ا</a:t>
             </a:r>
-            <a:pPr algn="ctr" indent="0" marL="0">
-              <a:buNone/>
-            </a:pPr>
             <a:r>
               <a:rPr lang="ar-SA" altLang="en-US" sz="6600" dirty="0">
                 <a:solidFill>
@@ -24775,9 +24724,6 @@
               </a:rPr>
               <a:t>غَ</a:t>
             </a:r>
-            <a:pPr algn="ctr" indent="0" marL="0">
-              <a:buNone/>
-            </a:pPr>
             <a:r>
               <a:rPr lang="ar-SA" altLang="en-US" sz="4290" dirty="0">
                 <a:solidFill>
@@ -24789,9 +24735,6 @@
               </a:rPr>
               <a:t>ا</a:t>
             </a:r>
-            <a:pPr algn="ctr" indent="0" marL="0">
-              <a:buNone/>
-            </a:pPr>
             <a:r>
               <a:rPr lang="ar-SA" altLang="en-US" sz="6600" dirty="0">
                 <a:solidFill>
@@ -26504,9 +26447,6 @@
               </a:rPr>
               <a:t>غَ</a:t>
             </a:r>
-            <a:pPr algn="ctr" indent="0" marL="0">
-              <a:buNone/>
-            </a:pPr>
             <a:r>
               <a:rPr lang="ar-SA" altLang="en-US" sz="4290" dirty="0">
                 <a:solidFill>
@@ -26518,9 +26458,6 @@
               </a:rPr>
               <a:t>ا</a:t>
             </a:r>
-            <a:pPr algn="ctr" indent="0" marL="0">
-              <a:buNone/>
-            </a:pPr>
             <a:r>
               <a:rPr lang="ar-SA" altLang="en-US" sz="6600" dirty="0">
                 <a:solidFill>
@@ -28105,9 +28042,6 @@
               </a:rPr>
               <a:t>عَ</a:t>
             </a:r>
-            <a:pPr algn="ctr" indent="0" marL="0">
-              <a:buNone/>
-            </a:pPr>
             <a:r>
               <a:rPr lang="ar-SA" altLang="en-US" sz="5850" dirty="0">
                 <a:solidFill>
@@ -28119,9 +28053,6 @@
               </a:rPr>
               <a:t>ا</a:t>
             </a:r>
-            <a:pPr algn="ctr" indent="0" marL="0">
-              <a:buNone/>
-            </a:pPr>
             <a:r>
               <a:rPr lang="ar-SA" altLang="en-US" sz="9000" dirty="0">
                 <a:solidFill>
@@ -29544,9 +29475,6 @@
               </a:rPr>
               <a:t>عَ</a:t>
             </a:r>
-            <a:pPr algn="ctr" indent="0" marL="0">
-              <a:buNone/>
-            </a:pPr>
             <a:r>
               <a:rPr lang="ar-SA" altLang="en-US" sz="5850" dirty="0">
                 <a:solidFill>
@@ -29558,9 +29486,6 @@
               </a:rPr>
               <a:t>ا</a:t>
             </a:r>
-            <a:pPr algn="ctr" indent="0" marL="0">
-              <a:buNone/>
-            </a:pPr>
             <a:r>
               <a:rPr lang="ar-SA" altLang="en-US" sz="9000" dirty="0">
                 <a:solidFill>
@@ -30983,9 +30908,6 @@
               </a:rPr>
               <a:t>عَ</a:t>
             </a:r>
-            <a:pPr algn="ctr" indent="0" marL="0">
-              <a:buNone/>
-            </a:pPr>
             <a:r>
               <a:rPr lang="ar-SA" altLang="en-US" sz="5850" dirty="0">
                 <a:solidFill>
@@ -30997,9 +30919,6 @@
               </a:rPr>
               <a:t>ا</a:t>
             </a:r>
-            <a:pPr algn="ctr" indent="0" marL="0">
-              <a:buNone/>
-            </a:pPr>
             <a:r>
               <a:rPr lang="ar-SA" altLang="en-US" sz="9000" dirty="0">
                 <a:solidFill>
@@ -33344,9 +33263,6 @@
               </a:rPr>
               <a:t>لَغَ</a:t>
             </a:r>
-            <a:pPr algn="ctr" indent="0" marL="0">
-              <a:buNone/>
-            </a:pPr>
             <a:r>
               <a:rPr lang="ar-SA" altLang="en-US" sz="5850" dirty="0">
                 <a:solidFill>
@@ -34769,9 +34685,6 @@
               </a:rPr>
               <a:t>غَ</a:t>
             </a:r>
-            <a:pPr algn="ctr" indent="0" marL="0">
-              <a:buNone/>
-            </a:pPr>
             <a:r>
               <a:rPr lang="ar-SA" altLang="en-US" sz="5850" dirty="0">
                 <a:solidFill>
@@ -34783,9 +34696,6 @@
               </a:rPr>
               <a:t>ا</a:t>
             </a:r>
-            <a:pPr algn="ctr" indent="0" marL="0">
-              <a:buNone/>
-            </a:pPr>
             <a:r>
               <a:rPr lang="ar-SA" altLang="en-US" sz="9000" dirty="0">
                 <a:solidFill>
@@ -36208,9 +36118,6 @@
               </a:rPr>
               <a:t>غَ</a:t>
             </a:r>
-            <a:pPr algn="ctr" indent="0" marL="0">
-              <a:buNone/>
-            </a:pPr>
             <a:r>
               <a:rPr lang="ar-SA" altLang="en-US" sz="5850" dirty="0">
                 <a:solidFill>
@@ -36222,9 +36129,6 @@
               </a:rPr>
               <a:t>ا</a:t>
             </a:r>
-            <a:pPr algn="ctr" indent="0" marL="0">
-              <a:buNone/>
-            </a:pPr>
             <a:r>
               <a:rPr lang="ar-SA" altLang="en-US" sz="9000" dirty="0">
                 <a:solidFill>
